--- a/dist/초2/국어/기초문해/초2_국어_기초문해_01_소리와글자가다른낱말_학생용.pptx
+++ b/dist/초2/국어/기초문해/초2_국어_기초문해_01_소리와글자가다른낱말_학생용.pptx
@@ -118,38 +118,38 @@
   <p:extLst>
     <p:ext uri="{521415D9-36F7-43E2-AB2F-B90AF26B5E84}">
       <p14:sectionLst xmlns:p14="http://schemas.microsoft.com/office/powerpoint/2010/main">
-        <p14:section name="도입" id="{38be7e99-5633-6926-4f71-5368cbd3ed85}">
+        <p14:section name="도입" id="{66f96a0b-d61c-0dbc-a2c1-f5bd169a2ed6}">
           <p14:sldIdLst>
             <p14:sldId id="256"/>
             <p14:sldId id="257"/>
           </p14:sldIdLst>
         </p14:section>
-        <p14:section name="개념" id="{8a3ba1e4-8aa8-14e2-124f-68b05edce75c}">
+        <p14:section name="개념" id="{2464fbf7-9e63-eebd-291b-265da272b645}">
           <p14:sldIdLst>
             <p14:sldId id="258"/>
             <p14:sldId id="259"/>
             <p14:sldId id="260"/>
           </p14:sldIdLst>
         </p14:section>
-        <p14:section name="연습" id="{6124dacb-d8c3-5aca-5792-ee862ca613ec}">
+        <p14:section name="연습" id="{e641a585-1b33-ad61-11d7-bf2627163e7b}">
           <p14:sldIdLst>
             <p14:sldId id="261"/>
             <p14:sldId id="262"/>
             <p14:sldId id="263"/>
           </p14:sldIdLst>
         </p14:section>
-        <p14:section name="확인" id="{f2652e82-a84b-c854-6dca-4d25c6885000}">
+        <p14:section name="확인" id="{8a87a1bf-4636-617d-c525-81a6780f791a}">
           <p14:sldIdLst>
             <p14:sldId id="264"/>
             <p14:sldId id="265"/>
           </p14:sldIdLst>
         </p14:section>
-        <p14:section name="정리" id="{97d458fa-69d1-5892-d25e-e0eb8f73bf55}">
+        <p14:section name="정리" id="{9c360b12-2408-9016-1155-73d80848bdef}">
           <p14:sldIdLst>
             <p14:sldId id="266"/>
           </p14:sldIdLst>
         </p14:section>
-        <p14:section name="보충" id="{c095e81f-7348-68e2-0c87-2f23eb07ddca}">
+        <p14:section name="보충" id="{4fb914e7-2a64-7639-9a3a-ceb6c97c120c}">
           <p14:sldIdLst>
             <p14:sldId id="267"/>
           </p14:sldIdLst>

--- a/dist/초2/국어/기초문해/초2_국어_기초문해_01_소리와글자가다른낱말_학생용.pptx
+++ b/dist/초2/국어/기초문해/초2_국어_기초문해_01_소리와글자가다른낱말_학생용.pptx
@@ -118,38 +118,38 @@
   <p:extLst>
     <p:ext uri="{521415D9-36F7-43E2-AB2F-B90AF26B5E84}">
       <p14:sectionLst xmlns:p14="http://schemas.microsoft.com/office/powerpoint/2010/main">
-        <p14:section name="도입" id="{66f96a0b-d61c-0dbc-a2c1-f5bd169a2ed6}">
+        <p14:section name="도입" id="{69ccc114-8150-cbbb-0371-7a0037c644ad}">
           <p14:sldIdLst>
             <p14:sldId id="256"/>
             <p14:sldId id="257"/>
           </p14:sldIdLst>
         </p14:section>
-        <p14:section name="개념" id="{2464fbf7-9e63-eebd-291b-265da272b645}">
+        <p14:section name="개념" id="{66d1e19a-4a2b-8641-5f80-833aa20ce79e}">
           <p14:sldIdLst>
             <p14:sldId id="258"/>
             <p14:sldId id="259"/>
             <p14:sldId id="260"/>
           </p14:sldIdLst>
         </p14:section>
-        <p14:section name="연습" id="{e641a585-1b33-ad61-11d7-bf2627163e7b}">
+        <p14:section name="연습" id="{59038c18-80dd-7ef9-db7b-d7a819253664}">
           <p14:sldIdLst>
             <p14:sldId id="261"/>
             <p14:sldId id="262"/>
             <p14:sldId id="263"/>
           </p14:sldIdLst>
         </p14:section>
-        <p14:section name="확인" id="{8a87a1bf-4636-617d-c525-81a6780f791a}">
+        <p14:section name="확인" id="{987c6fe2-835d-4161-edf6-99248cdf5868}">
           <p14:sldIdLst>
             <p14:sldId id="264"/>
             <p14:sldId id="265"/>
           </p14:sldIdLst>
         </p14:section>
-        <p14:section name="정리" id="{9c360b12-2408-9016-1155-73d80848bdef}">
+        <p14:section name="정리" id="{cb7dbf02-016f-ef3e-aeb5-d580a0f34408}">
           <p14:sldIdLst>
             <p14:sldId id="266"/>
           </p14:sldIdLst>
         </p14:section>
-        <p14:section name="보충" id="{4fb914e7-2a64-7639-9a3a-ceb6c97c120c}">
+        <p14:section name="보충" id="{cbefd105-7d91-31aa-e4a2-c95782ae5399}">
           <p14:sldIdLst>
             <p14:sldId id="267"/>
           </p14:sldIdLst>
@@ -2609,7 +2609,7 @@
               <a:buNone/>
             </a:pPr>
             <a:r>
-              <a:rPr lang="ko-KR" altLang="en-US" sz="5000" b="1" dirty="0">
+              <a:rPr lang="ko-KR" altLang="en-US" sz="4400" b="1" dirty="0">
                 <a:solidFill>
                   <a:srgbClr val="FFFFFF"/>
                 </a:solidFill>
